--- a/黒崎/AI研修一覧/A-102_生成AIの仕組み/スライド.pptx
+++ b/黒崎/AI研修一覧/A-102_生成AIの仕組み/スライド.pptx
@@ -5813,7 +5813,7 @@
         <p:spPr>
           <a:xfrm>
             <a:off x="685800" y="1005840"/>
-            <a:ext cx="1554480" cy="365760"/>
+            <a:ext cx="1554480" cy="320040"/>
           </a:xfrm>
           <a:prstGeom prst="rect">
             <a:avLst/>
@@ -5833,7 +5833,7 @@
         <p:spPr>
           <a:xfrm>
             <a:off x="777240" y="1005840"/>
-            <a:ext cx="1371600" cy="365760"/>
+            <a:ext cx="1371600" cy="320040"/>
           </a:xfrm>
           <a:prstGeom prst="rect">
             <a:avLst/>
@@ -5874,7 +5874,7 @@
         <p:spPr>
           <a:xfrm>
             <a:off x="2331720" y="1005840"/>
-            <a:ext cx="2103120" cy="365760"/>
+            <a:ext cx="2103120" cy="320040"/>
           </a:xfrm>
           <a:prstGeom prst="rect">
             <a:avLst/>
@@ -5894,7 +5894,7 @@
         <p:spPr>
           <a:xfrm>
             <a:off x="2423160" y="1005840"/>
-            <a:ext cx="1920240" cy="365760"/>
+            <a:ext cx="1920240" cy="320040"/>
           </a:xfrm>
           <a:prstGeom prst="rect">
             <a:avLst/>
@@ -5935,7 +5935,7 @@
         <p:spPr>
           <a:xfrm>
             <a:off x="4526280" y="1005840"/>
-            <a:ext cx="2468880" cy="365760"/>
+            <a:ext cx="2468880" cy="320040"/>
           </a:xfrm>
           <a:prstGeom prst="rect">
             <a:avLst/>
@@ -5955,7 +5955,7 @@
         <p:spPr>
           <a:xfrm>
             <a:off x="4617720" y="1005840"/>
-            <a:ext cx="2286000" cy="365760"/>
+            <a:ext cx="2286000" cy="320040"/>
           </a:xfrm>
           <a:prstGeom prst="rect">
             <a:avLst/>
@@ -5996,7 +5996,7 @@
         <p:spPr>
           <a:xfrm>
             <a:off x="7086600" y="1005840"/>
-            <a:ext cx="1645920" cy="365760"/>
+            <a:ext cx="1645920" cy="320040"/>
           </a:xfrm>
           <a:prstGeom prst="rect">
             <a:avLst/>
@@ -6016,7 +6016,7 @@
         <p:spPr>
           <a:xfrm>
             <a:off x="7178040" y="1005840"/>
-            <a:ext cx="1463040" cy="365760"/>
+            <a:ext cx="1463040" cy="320040"/>
           </a:xfrm>
           <a:prstGeom prst="rect">
             <a:avLst/>
@@ -6056,8 +6056,8 @@
         </p:nvSpPr>
         <p:spPr>
           <a:xfrm>
-            <a:off x="685800" y="1417320"/>
-            <a:ext cx="1554480" cy="411480"/>
+            <a:off x="685800" y="1371600"/>
+            <a:ext cx="1554480" cy="347472"/>
           </a:xfrm>
           <a:prstGeom prst="rect">
             <a:avLst/>
@@ -6081,8 +6081,8 @@
         </p:nvSpPr>
         <p:spPr>
           <a:xfrm>
-            <a:off x="777240" y="1417320"/>
-            <a:ext cx="1371600" cy="411480"/>
+            <a:off x="777240" y="1371600"/>
+            <a:ext cx="1371600" cy="347472"/>
           </a:xfrm>
           <a:prstGeom prst="rect">
             <a:avLst/>
@@ -6122,8 +6122,8 @@
         </p:nvSpPr>
         <p:spPr>
           <a:xfrm>
-            <a:off x="2331720" y="1417320"/>
-            <a:ext cx="2103120" cy="411480"/>
+            <a:off x="2331720" y="1371600"/>
+            <a:ext cx="2103120" cy="347472"/>
           </a:xfrm>
           <a:prstGeom prst="rect">
             <a:avLst/>
@@ -6147,8 +6147,8 @@
         </p:nvSpPr>
         <p:spPr>
           <a:xfrm>
-            <a:off x="2423160" y="1417320"/>
-            <a:ext cx="1920240" cy="411480"/>
+            <a:off x="2423160" y="1371600"/>
+            <a:ext cx="1920240" cy="347472"/>
           </a:xfrm>
           <a:prstGeom prst="rect">
             <a:avLst/>
@@ -6188,8 +6188,8 @@
         </p:nvSpPr>
         <p:spPr>
           <a:xfrm>
-            <a:off x="4526280" y="1417320"/>
-            <a:ext cx="2468880" cy="411480"/>
+            <a:off x="4526280" y="1371600"/>
+            <a:ext cx="2468880" cy="347472"/>
           </a:xfrm>
           <a:prstGeom prst="rect">
             <a:avLst/>
@@ -6213,8 +6213,8 @@
         </p:nvSpPr>
         <p:spPr>
           <a:xfrm>
-            <a:off x="4617720" y="1417320"/>
-            <a:ext cx="2286000" cy="411480"/>
+            <a:off x="4617720" y="1371600"/>
+            <a:ext cx="2286000" cy="347472"/>
           </a:xfrm>
           <a:prstGeom prst="rect">
             <a:avLst/>
@@ -6254,8 +6254,8 @@
         </p:nvSpPr>
         <p:spPr>
           <a:xfrm>
-            <a:off x="7086600" y="1417320"/>
-            <a:ext cx="1645920" cy="411480"/>
+            <a:off x="7086600" y="1371600"/>
+            <a:ext cx="1645920" cy="347472"/>
           </a:xfrm>
           <a:prstGeom prst="rect">
             <a:avLst/>
@@ -6279,8 +6279,8 @@
         </p:nvSpPr>
         <p:spPr>
           <a:xfrm>
-            <a:off x="7178040" y="1417320"/>
-            <a:ext cx="1463040" cy="411480"/>
+            <a:off x="7178040" y="1371600"/>
+            <a:ext cx="1463040" cy="347472"/>
           </a:xfrm>
           <a:prstGeom prst="rect">
             <a:avLst/>
@@ -6320,8 +6320,8 @@
         </p:nvSpPr>
         <p:spPr>
           <a:xfrm>
-            <a:off x="685800" y="1874520"/>
-            <a:ext cx="1554480" cy="411480"/>
+            <a:off x="685800" y="1755648"/>
+            <a:ext cx="1554480" cy="347472"/>
           </a:xfrm>
           <a:prstGeom prst="rect">
             <a:avLst/>
@@ -6345,8 +6345,8 @@
         </p:nvSpPr>
         <p:spPr>
           <a:xfrm>
-            <a:off x="777240" y="1874520"/>
-            <a:ext cx="1371600" cy="411480"/>
+            <a:off x="777240" y="1755648"/>
+            <a:ext cx="1371600" cy="347472"/>
           </a:xfrm>
           <a:prstGeom prst="rect">
             <a:avLst/>
@@ -6386,8 +6386,8 @@
         </p:nvSpPr>
         <p:spPr>
           <a:xfrm>
-            <a:off x="2331720" y="1874520"/>
-            <a:ext cx="2103120" cy="411480"/>
+            <a:off x="2331720" y="1755648"/>
+            <a:ext cx="2103120" cy="347472"/>
           </a:xfrm>
           <a:prstGeom prst="rect">
             <a:avLst/>
@@ -6411,8 +6411,8 @@
         </p:nvSpPr>
         <p:spPr>
           <a:xfrm>
-            <a:off x="2423160" y="1874520"/>
-            <a:ext cx="1920240" cy="411480"/>
+            <a:off x="2423160" y="1755648"/>
+            <a:ext cx="1920240" cy="347472"/>
           </a:xfrm>
           <a:prstGeom prst="rect">
             <a:avLst/>
@@ -6452,8 +6452,8 @@
         </p:nvSpPr>
         <p:spPr>
           <a:xfrm>
-            <a:off x="4526280" y="1874520"/>
-            <a:ext cx="2468880" cy="411480"/>
+            <a:off x="4526280" y="1755648"/>
+            <a:ext cx="2468880" cy="347472"/>
           </a:xfrm>
           <a:prstGeom prst="rect">
             <a:avLst/>
@@ -6477,8 +6477,8 @@
         </p:nvSpPr>
         <p:spPr>
           <a:xfrm>
-            <a:off x="4617720" y="1874520"/>
-            <a:ext cx="2286000" cy="411480"/>
+            <a:off x="4617720" y="1755648"/>
+            <a:ext cx="2286000" cy="347472"/>
           </a:xfrm>
           <a:prstGeom prst="rect">
             <a:avLst/>
@@ -6518,8 +6518,8 @@
         </p:nvSpPr>
         <p:spPr>
           <a:xfrm>
-            <a:off x="7086600" y="1874520"/>
-            <a:ext cx="1645920" cy="411480"/>
+            <a:off x="7086600" y="1755648"/>
+            <a:ext cx="1645920" cy="347472"/>
           </a:xfrm>
           <a:prstGeom prst="rect">
             <a:avLst/>
@@ -6543,8 +6543,8 @@
         </p:nvSpPr>
         <p:spPr>
           <a:xfrm>
-            <a:off x="7178040" y="1874520"/>
-            <a:ext cx="1463040" cy="411480"/>
+            <a:off x="7178040" y="1755648"/>
+            <a:ext cx="1463040" cy="347472"/>
           </a:xfrm>
           <a:prstGeom prst="rect">
             <a:avLst/>
@@ -6584,8 +6584,8 @@
         </p:nvSpPr>
         <p:spPr>
           <a:xfrm>
-            <a:off x="685800" y="2331720"/>
-            <a:ext cx="1554480" cy="411480"/>
+            <a:off x="685800" y="2139696"/>
+            <a:ext cx="1554480" cy="347472"/>
           </a:xfrm>
           <a:prstGeom prst="rect">
             <a:avLst/>
@@ -6609,8 +6609,8 @@
         </p:nvSpPr>
         <p:spPr>
           <a:xfrm>
-            <a:off x="777240" y="2331720"/>
-            <a:ext cx="1371600" cy="411480"/>
+            <a:off x="777240" y="2139696"/>
+            <a:ext cx="1371600" cy="347472"/>
           </a:xfrm>
           <a:prstGeom prst="rect">
             <a:avLst/>
@@ -6650,8 +6650,8 @@
         </p:nvSpPr>
         <p:spPr>
           <a:xfrm>
-            <a:off x="2331720" y="2331720"/>
-            <a:ext cx="2103120" cy="411480"/>
+            <a:off x="2331720" y="2139696"/>
+            <a:ext cx="2103120" cy="347472"/>
           </a:xfrm>
           <a:prstGeom prst="rect">
             <a:avLst/>
@@ -6675,8 +6675,8 @@
         </p:nvSpPr>
         <p:spPr>
           <a:xfrm>
-            <a:off x="2423160" y="2331720"/>
-            <a:ext cx="1920240" cy="411480"/>
+            <a:off x="2423160" y="2139696"/>
+            <a:ext cx="1920240" cy="347472"/>
           </a:xfrm>
           <a:prstGeom prst="rect">
             <a:avLst/>
@@ -6716,8 +6716,8 @@
         </p:nvSpPr>
         <p:spPr>
           <a:xfrm>
-            <a:off x="4526280" y="2331720"/>
-            <a:ext cx="2468880" cy="411480"/>
+            <a:off x="4526280" y="2139696"/>
+            <a:ext cx="2468880" cy="347472"/>
           </a:xfrm>
           <a:prstGeom prst="rect">
             <a:avLst/>
@@ -6741,8 +6741,8 @@
         </p:nvSpPr>
         <p:spPr>
           <a:xfrm>
-            <a:off x="4617720" y="2331720"/>
-            <a:ext cx="2286000" cy="411480"/>
+            <a:off x="4617720" y="2139696"/>
+            <a:ext cx="2286000" cy="347472"/>
           </a:xfrm>
           <a:prstGeom prst="rect">
             <a:avLst/>
@@ -6782,8 +6782,8 @@
         </p:nvSpPr>
         <p:spPr>
           <a:xfrm>
-            <a:off x="7086600" y="2331720"/>
-            <a:ext cx="1645920" cy="411480"/>
+            <a:off x="7086600" y="2139696"/>
+            <a:ext cx="1645920" cy="347472"/>
           </a:xfrm>
           <a:prstGeom prst="rect">
             <a:avLst/>
@@ -6807,8 +6807,8 @@
         </p:nvSpPr>
         <p:spPr>
           <a:xfrm>
-            <a:off x="7178040" y="2331720"/>
-            <a:ext cx="1463040" cy="411480"/>
+            <a:off x="7178040" y="2139696"/>
+            <a:ext cx="1463040" cy="347472"/>
           </a:xfrm>
           <a:prstGeom prst="rect">
             <a:avLst/>
@@ -6848,8 +6848,8 @@
         </p:nvSpPr>
         <p:spPr>
           <a:xfrm>
-            <a:off x="685800" y="2788920"/>
-            <a:ext cx="1554480" cy="411480"/>
+            <a:off x="685800" y="2523744"/>
+            <a:ext cx="1554480" cy="347472"/>
           </a:xfrm>
           <a:prstGeom prst="rect">
             <a:avLst/>
@@ -6873,8 +6873,8 @@
         </p:nvSpPr>
         <p:spPr>
           <a:xfrm>
-            <a:off x="777240" y="2788920"/>
-            <a:ext cx="1371600" cy="411480"/>
+            <a:off x="777240" y="2523744"/>
+            <a:ext cx="1371600" cy="347472"/>
           </a:xfrm>
           <a:prstGeom prst="rect">
             <a:avLst/>
@@ -6914,8 +6914,8 @@
         </p:nvSpPr>
         <p:spPr>
           <a:xfrm>
-            <a:off x="2331720" y="2788920"/>
-            <a:ext cx="2103120" cy="411480"/>
+            <a:off x="2331720" y="2523744"/>
+            <a:ext cx="2103120" cy="347472"/>
           </a:xfrm>
           <a:prstGeom prst="rect">
             <a:avLst/>
@@ -6939,8 +6939,8 @@
         </p:nvSpPr>
         <p:spPr>
           <a:xfrm>
-            <a:off x="2423160" y="2788920"/>
-            <a:ext cx="1920240" cy="411480"/>
+            <a:off x="2423160" y="2523744"/>
+            <a:ext cx="1920240" cy="347472"/>
           </a:xfrm>
           <a:prstGeom prst="rect">
             <a:avLst/>
@@ -6980,8 +6980,8 @@
         </p:nvSpPr>
         <p:spPr>
           <a:xfrm>
-            <a:off x="4526280" y="2788920"/>
-            <a:ext cx="2468880" cy="411480"/>
+            <a:off x="4526280" y="2523744"/>
+            <a:ext cx="2468880" cy="347472"/>
           </a:xfrm>
           <a:prstGeom prst="rect">
             <a:avLst/>
@@ -7005,8 +7005,8 @@
         </p:nvSpPr>
         <p:spPr>
           <a:xfrm>
-            <a:off x="4617720" y="2788920"/>
-            <a:ext cx="2286000" cy="411480"/>
+            <a:off x="4617720" y="2523744"/>
+            <a:ext cx="2286000" cy="347472"/>
           </a:xfrm>
           <a:prstGeom prst="rect">
             <a:avLst/>
@@ -7046,8 +7046,8 @@
         </p:nvSpPr>
         <p:spPr>
           <a:xfrm>
-            <a:off x="7086600" y="2788920"/>
-            <a:ext cx="1645920" cy="411480"/>
+            <a:off x="7086600" y="2523744"/>
+            <a:ext cx="1645920" cy="347472"/>
           </a:xfrm>
           <a:prstGeom prst="rect">
             <a:avLst/>
@@ -7071,8 +7071,8 @@
         </p:nvSpPr>
         <p:spPr>
           <a:xfrm>
-            <a:off x="7178040" y="2788920"/>
-            <a:ext cx="1463040" cy="411480"/>
+            <a:off x="7178040" y="2523744"/>
+            <a:ext cx="1463040" cy="347472"/>
           </a:xfrm>
           <a:prstGeom prst="rect">
             <a:avLst/>
@@ -7112,8 +7112,8 @@
         </p:nvSpPr>
         <p:spPr>
           <a:xfrm>
-            <a:off x="685800" y="3246120"/>
-            <a:ext cx="1554480" cy="411480"/>
+            <a:off x="685800" y="2907792"/>
+            <a:ext cx="1554480" cy="347472"/>
           </a:xfrm>
           <a:prstGeom prst="rect">
             <a:avLst/>
@@ -7137,8 +7137,8 @@
         </p:nvSpPr>
         <p:spPr>
           <a:xfrm>
-            <a:off x="777240" y="3246120"/>
-            <a:ext cx="1371600" cy="411480"/>
+            <a:off x="777240" y="2907792"/>
+            <a:ext cx="1371600" cy="347472"/>
           </a:xfrm>
           <a:prstGeom prst="rect">
             <a:avLst/>
@@ -7178,8 +7178,8 @@
         </p:nvSpPr>
         <p:spPr>
           <a:xfrm>
-            <a:off x="2331720" y="3246120"/>
-            <a:ext cx="2103120" cy="411480"/>
+            <a:off x="2331720" y="2907792"/>
+            <a:ext cx="2103120" cy="347472"/>
           </a:xfrm>
           <a:prstGeom prst="rect">
             <a:avLst/>
@@ -7203,8 +7203,8 @@
         </p:nvSpPr>
         <p:spPr>
           <a:xfrm>
-            <a:off x="2423160" y="3246120"/>
-            <a:ext cx="1920240" cy="411480"/>
+            <a:off x="2423160" y="2907792"/>
+            <a:ext cx="1920240" cy="347472"/>
           </a:xfrm>
           <a:prstGeom prst="rect">
             <a:avLst/>
@@ -7244,8 +7244,8 @@
         </p:nvSpPr>
         <p:spPr>
           <a:xfrm>
-            <a:off x="4526280" y="3246120"/>
-            <a:ext cx="2468880" cy="411480"/>
+            <a:off x="4526280" y="2907792"/>
+            <a:ext cx="2468880" cy="347472"/>
           </a:xfrm>
           <a:prstGeom prst="rect">
             <a:avLst/>
@@ -7269,8 +7269,8 @@
         </p:nvSpPr>
         <p:spPr>
           <a:xfrm>
-            <a:off x="4617720" y="3246120"/>
-            <a:ext cx="2286000" cy="411480"/>
+            <a:off x="4617720" y="2907792"/>
+            <a:ext cx="2286000" cy="347472"/>
           </a:xfrm>
           <a:prstGeom prst="rect">
             <a:avLst/>
@@ -7310,8 +7310,8 @@
         </p:nvSpPr>
         <p:spPr>
           <a:xfrm>
-            <a:off x="7086600" y="3246120"/>
-            <a:ext cx="1645920" cy="411480"/>
+            <a:off x="7086600" y="2907792"/>
+            <a:ext cx="1645920" cy="347472"/>
           </a:xfrm>
           <a:prstGeom prst="rect">
             <a:avLst/>
@@ -7335,8 +7335,8 @@
         </p:nvSpPr>
         <p:spPr>
           <a:xfrm>
-            <a:off x="7178040" y="3246120"/>
-            <a:ext cx="1463040" cy="411480"/>
+            <a:off x="7178040" y="2907792"/>
+            <a:ext cx="1463040" cy="347472"/>
           </a:xfrm>
           <a:prstGeom prst="rect">
             <a:avLst/>
@@ -7376,7 +7376,7 @@
         </p:nvSpPr>
         <p:spPr>
           <a:xfrm>
-            <a:off x="685800" y="3474720"/>
+            <a:off x="685800" y="3383280"/>
             <a:ext cx="7772400" cy="365760"/>
           </a:xfrm>
           <a:prstGeom prst="rect">
@@ -7396,7 +7396,7 @@
         </p:nvSpPr>
         <p:spPr>
           <a:xfrm>
-            <a:off x="868680" y="3474720"/>
+            <a:off x="868680" y="3383280"/>
             <a:ext cx="7406640" cy="365760"/>
           </a:xfrm>
           <a:prstGeom prst="rect">
